--- a/deliverables/video-5-slides/out/Video_5_Main_Slides.pptx
+++ b/deliverables/video-5-slides/out/Video_5_Main_Slides.pptx
@@ -4870,8 +4870,8 @@
         </p:nvSpPr>
         <p:spPr>
           <a:xfrm>
-            <a:off x="1016000" y="4787900"/>
-            <a:ext cx="4445000" cy="304800"/>
+            <a:off x="1016000" y="4775200"/>
+            <a:ext cx="4826000" cy="406400"/>
           </a:xfrm>
           <a:prstGeom prst="rect">
             <a:avLst/>
@@ -4890,7 +4890,7 @@
               </a:lnSpc>
             </a:pPr>
             <a:r>
-              <a:rPr sz="1800" b="1" i="0" spc="130">
+              <a:rPr sz="2500" b="1" i="0" spc="130">
                 <a:solidFill>
                   <a:srgbClr val="F5F1E8"/>
                 </a:solidFill>
@@ -4911,8 +4911,8 @@
         </p:nvSpPr>
         <p:spPr>
           <a:xfrm>
-            <a:off x="4064000" y="4876800"/>
-            <a:ext cx="215900" cy="38100"/>
+            <a:off x="4483100" y="4851400"/>
+            <a:ext cx="279400" cy="44450"/>
           </a:xfrm>
           <a:prstGeom prst="rect">
             <a:avLst/>
@@ -4955,8 +4955,8 @@
         </p:nvSpPr>
         <p:spPr>
           <a:xfrm>
-            <a:off x="4064000" y="4941570"/>
-            <a:ext cx="215900" cy="38100"/>
+            <a:off x="4483100" y="4935220"/>
+            <a:ext cx="279400" cy="44450"/>
           </a:xfrm>
           <a:prstGeom prst="rect">
             <a:avLst/>
@@ -4999,8 +4999,8 @@
         </p:nvSpPr>
         <p:spPr>
           <a:xfrm rot="1320000">
-            <a:off x="4152900" y="4803394"/>
-            <a:ext cx="38100" cy="226695"/>
+            <a:off x="4600575" y="4756404"/>
+            <a:ext cx="44450" cy="293370"/>
           </a:xfrm>
           <a:prstGeom prst="rect">
             <a:avLst/>
@@ -5043,8 +5043,8 @@
         </p:nvSpPr>
         <p:spPr>
           <a:xfrm>
-            <a:off x="4546600" y="4787900"/>
-            <a:ext cx="5715000" cy="304800"/>
+            <a:off x="5080000" y="4775200"/>
+            <a:ext cx="6350000" cy="406400"/>
           </a:xfrm>
           <a:prstGeom prst="rect">
             <a:avLst/>
@@ -5063,7 +5063,7 @@
               </a:lnSpc>
             </a:pPr>
             <a:r>
-              <a:rPr sz="1800" b="1" i="0" spc="130">
+              <a:rPr sz="2500" b="1" i="0" spc="130">
                 <a:solidFill>
                   <a:srgbClr val="F5F1E8"/>
                 </a:solidFill>
@@ -5788,7 +5788,7 @@
         <p:spPr>
           <a:xfrm>
             <a:off x="1016000" y="3949700"/>
-            <a:ext cx="9906000" cy="742950"/>
+            <a:ext cx="9906000" cy="844550"/>
           </a:xfrm>
           <a:prstGeom prst="rect">
             <a:avLst/>
@@ -5807,7 +5807,7 @@
               </a:lnSpc>
             </a:pPr>
             <a:r>
-              <a:rPr sz="2100" b="0" i="0">
+              <a:rPr sz="2400" b="0" i="0">
                 <a:solidFill>
                   <a:srgbClr val="F5F1E8"/>
                 </a:solidFill>
@@ -5819,7 +5819,7 @@
             </a:r>
             <a:br/>
             <a:r>
-              <a:rPr sz="2100" b="0" i="0">
+              <a:rPr sz="2400" b="0" i="0">
                 <a:solidFill>
                   <a:srgbClr val="F5F1E8"/>
                 </a:solidFill>
@@ -6058,7 +6058,7 @@
         <p:spPr>
           <a:xfrm>
             <a:off x="1016000" y="4356100"/>
-            <a:ext cx="5969000" cy="685800"/>
+            <a:ext cx="5969000" cy="787400"/>
           </a:xfrm>
           <a:prstGeom prst="rect">
             <a:avLst/>
@@ -6077,7 +6077,7 @@
               </a:lnSpc>
             </a:pPr>
             <a:r>
-              <a:rPr sz="1900" b="1" i="0">
+              <a:rPr sz="2200" b="1" i="0">
                 <a:solidFill>
                   <a:srgbClr val="3E506B"/>
                 </a:solidFill>
@@ -6089,7 +6089,7 @@
             </a:r>
             <a:br/>
             <a:r>
-              <a:rPr sz="1900" b="1" i="0">
+              <a:rPr sz="2200" b="1" i="0">
                 <a:solidFill>
                   <a:srgbClr val="3E506B"/>
                 </a:solidFill>
@@ -6666,8 +6666,8 @@
         </p:nvSpPr>
         <p:spPr>
           <a:xfrm>
-            <a:off x="863600" y="3556000"/>
-            <a:ext cx="10287000" cy="412750"/>
+            <a:off x="863600" y="3530600"/>
+            <a:ext cx="10541000" cy="482600"/>
           </a:xfrm>
           <a:prstGeom prst="rect">
             <a:avLst/>
@@ -6686,7 +6686,7 @@
               </a:lnSpc>
             </a:pPr>
             <a:r>
-              <a:rPr sz="2200" b="0" i="0">
+              <a:rPr sz="2600" b="0" i="0">
                 <a:solidFill>
                   <a:srgbClr val="F5F1E8"/>
                 </a:solidFill>
@@ -7281,8 +7281,8 @@
         </p:nvSpPr>
         <p:spPr>
           <a:xfrm>
-            <a:off x="863600" y="3556000"/>
-            <a:ext cx="10287000" cy="412750"/>
+            <a:off x="863600" y="3530600"/>
+            <a:ext cx="10541000" cy="482600"/>
           </a:xfrm>
           <a:prstGeom prst="rect">
             <a:avLst/>
@@ -7301,7 +7301,7 @@
               </a:lnSpc>
             </a:pPr>
             <a:r>
-              <a:rPr sz="2200" b="0" i="0">
+              <a:rPr sz="2600" b="0" i="0">
                 <a:solidFill>
                   <a:srgbClr val="F5F1E8"/>
                 </a:solidFill>
@@ -7348,8 +7348,8 @@
         </p:nvSpPr>
         <p:spPr>
           <a:xfrm>
-            <a:off x="1206500" y="2540000"/>
-            <a:ext cx="4191000" cy="412750"/>
+            <a:off x="698500" y="2540000"/>
+            <a:ext cx="5016500" cy="412750"/>
           </a:xfrm>
           <a:prstGeom prst="rect">
             <a:avLst/>
@@ -7389,7 +7389,7 @@
         </p:nvSpPr>
         <p:spPr>
           <a:xfrm>
-            <a:off x="1206500" y="3111500"/>
+            <a:off x="698500" y="3111500"/>
             <a:ext cx="1079500" cy="25400"/>
           </a:xfrm>
           <a:prstGeom prst="rect">
@@ -7433,8 +7433,8 @@
         </p:nvSpPr>
         <p:spPr>
           <a:xfrm>
-            <a:off x="1206500" y="3441700"/>
-            <a:ext cx="4191000" cy="374650"/>
+            <a:off x="698500" y="3441700"/>
+            <a:ext cx="5080000" cy="425450"/>
           </a:xfrm>
           <a:prstGeom prst="rect">
             <a:avLst/>
@@ -7453,7 +7453,7 @@
               </a:lnSpc>
             </a:pPr>
             <a:r>
-              <a:rPr sz="1900" b="0" i="0">
+              <a:rPr sz="2200" b="0" i="0">
                 <a:solidFill>
                   <a:srgbClr val="5A6B82"/>
                 </a:solidFill>
@@ -7474,8 +7474,8 @@
         </p:nvSpPr>
         <p:spPr>
           <a:xfrm>
-            <a:off x="6254750" y="2006600"/>
-            <a:ext cx="5080000" cy="2565400"/>
+            <a:off x="5905500" y="2006600"/>
+            <a:ext cx="6096000" cy="2565400"/>
           </a:xfrm>
           <a:prstGeom prst="rect">
             <a:avLst/>
@@ -7518,8 +7518,8 @@
         </p:nvSpPr>
         <p:spPr>
           <a:xfrm>
-            <a:off x="6826250" y="2540000"/>
-            <a:ext cx="4191000" cy="412750"/>
+            <a:off x="6254750" y="2540000"/>
+            <a:ext cx="5524500" cy="412750"/>
           </a:xfrm>
           <a:prstGeom prst="rect">
             <a:avLst/>
@@ -7559,7 +7559,7 @@
         </p:nvSpPr>
         <p:spPr>
           <a:xfrm>
-            <a:off x="6826250" y="3111500"/>
+            <a:off x="6254750" y="3111500"/>
             <a:ext cx="1079500" cy="25400"/>
           </a:xfrm>
           <a:prstGeom prst="rect">
@@ -7603,8 +7603,8 @@
         </p:nvSpPr>
         <p:spPr>
           <a:xfrm>
-            <a:off x="6826250" y="3441700"/>
-            <a:ext cx="4191000" cy="374650"/>
+            <a:off x="6254750" y="3441700"/>
+            <a:ext cx="5524500" cy="425450"/>
           </a:xfrm>
           <a:prstGeom prst="rect">
             <a:avLst/>
@@ -7623,7 +7623,7 @@
               </a:lnSpc>
             </a:pPr>
             <a:r>
-              <a:rPr sz="1900" b="0" i="0">
+              <a:rPr sz="2200" b="0" i="0">
                 <a:solidFill>
                   <a:srgbClr val="F5F1E8"/>
                 </a:solidFill>
@@ -7852,8 +7852,8 @@
         </p:nvSpPr>
         <p:spPr>
           <a:xfrm>
-            <a:off x="863600" y="3556000"/>
-            <a:ext cx="10287000" cy="412750"/>
+            <a:off x="863600" y="3530600"/>
+            <a:ext cx="10541000" cy="482600"/>
           </a:xfrm>
           <a:prstGeom prst="rect">
             <a:avLst/>
@@ -7872,7 +7872,7 @@
               </a:lnSpc>
             </a:pPr>
             <a:r>
-              <a:rPr sz="2200" b="0" i="0">
+              <a:rPr sz="2600" b="0" i="0">
                 <a:solidFill>
                   <a:srgbClr val="F5F1E8"/>
                 </a:solidFill>
@@ -7960,8 +7960,8 @@
         </p:nvSpPr>
         <p:spPr>
           <a:xfrm>
-            <a:off x="4318000" y="1663700"/>
-            <a:ext cx="6858000" cy="400050"/>
+            <a:off x="4318000" y="1651000"/>
+            <a:ext cx="6921500" cy="444500"/>
           </a:xfrm>
           <a:prstGeom prst="rect">
             <a:avLst/>
@@ -7980,9 +7980,9 @@
               </a:lnSpc>
             </a:pPr>
             <a:r>
-              <a:rPr sz="2100" b="0" i="0">
+              <a:rPr sz="2400" b="0" i="0">
                 <a:solidFill>
-                  <a:srgbClr val="5A6B82"/>
+                  <a:srgbClr val="244B78"/>
                 </a:solidFill>
                 <a:latin typeface="DM Sans"/>
                 <a:ea typeface="DM Sans"/>
@@ -8086,8 +8086,8 @@
         </p:nvSpPr>
         <p:spPr>
           <a:xfrm>
-            <a:off x="4318000" y="2870200"/>
-            <a:ext cx="6858000" cy="400050"/>
+            <a:off x="4318000" y="2857500"/>
+            <a:ext cx="6921500" cy="444500"/>
           </a:xfrm>
           <a:prstGeom prst="rect">
             <a:avLst/>
@@ -8106,9 +8106,9 @@
               </a:lnSpc>
             </a:pPr>
             <a:r>
-              <a:rPr sz="2100" b="0" i="0">
+              <a:rPr sz="2400" b="0" i="0">
                 <a:solidFill>
-                  <a:srgbClr val="5A6B82"/>
+                  <a:srgbClr val="244B78"/>
                 </a:solidFill>
                 <a:latin typeface="DM Sans"/>
                 <a:ea typeface="DM Sans"/>
@@ -8212,8 +8212,8 @@
         </p:nvSpPr>
         <p:spPr>
           <a:xfrm>
-            <a:off x="4318000" y="4076700"/>
-            <a:ext cx="6858000" cy="400050"/>
+            <a:off x="4318000" y="4064000"/>
+            <a:ext cx="6921500" cy="444500"/>
           </a:xfrm>
           <a:prstGeom prst="rect">
             <a:avLst/>
@@ -8232,9 +8232,9 @@
               </a:lnSpc>
             </a:pPr>
             <a:r>
-              <a:rPr sz="2100" b="0" i="0">
+              <a:rPr sz="2400" b="0" i="0">
                 <a:solidFill>
-                  <a:srgbClr val="5A6B82"/>
+                  <a:srgbClr val="244B78"/>
                 </a:solidFill>
                 <a:latin typeface="DM Sans"/>
                 <a:ea typeface="DM Sans"/>

--- a/deliverables/video-5-slides/out/Video_5_Main_Slides.pptx
+++ b/deliverables/video-5-slides/out/Video_5_Main_Slides.pptx
@@ -513,40 +513,27 @@
           <a:lstStyle/>
           <a:p>
             <a:r>
-              <a:t>Timing: approximately 0:25.</a:t>
-            </a:r>
-          </a:p>
-          <a:p/>
-          <a:p>
-            <a:r>
-              <a:t>Begin full screen on Temidayo. This is the first teaching visual and it lands</a:t>
-            </a:r>
-          </a:p>
-          <a:p>
-            <a:r>
-              <a:t>only after the opening promise.</a:t>
-            </a:r>
-          </a:p>
-          <a:p/>
-          <a:p>
-            <a:r>
-              <a:t>State one holds the main statement. Reveal the second line after the first</a:t>
-            </a:r>
-          </a:p>
-          <a:p>
-            <a:r>
-              <a:t>statement has been made.</a:t>
-            </a:r>
-          </a:p>
-          <a:p/>
-          <a:p>
-            <a:r>
-              <a:t>The not-equal sign is drawn rather than typeset: no brand font contains that</a:t>
-            </a:r>
-          </a:p>
-          <a:p>
-            <a:r>
-              <a:t>glyph.</a:t>
+              <a:t>Timing: approximately 0:38.</a:t>
+            </a:r>
+          </a:p>
+          <a:p>
+            <a:r>
+              <a:t>Bring this up only after the H.I.T. opening has fully landed: the hook, SAME COMPANY / DIFFERENT WORK, the maternity-return proof and the three questions.</a:t>
+            </a:r>
+          </a:p>
+          <a:p>
+            <a:r>
+              <a:t>State one holds the main statement. Reveal the INTERNAL MOVE ≠ AUTOMATIC GROWTH line after the first statement has been made.</a:t>
+            </a:r>
+          </a:p>
+          <a:p>
+            <a:r>
+              <a:t>The not-equal sign is drawn rather than typeset: no brand font contains that glyph.</a:t>
+            </a:r>
+          </a:p>
+          <a:p>
+            <a:r>
+              <a:t>Hold through the organizational turn that follows — an internal move is also a decision the organization is making about what it will trust this person to do next. That passage is carried by Temidayo on camera, not by a new slide.</a:t>
             </a:r>
           </a:p>
         </p:txBody>
@@ -616,24 +603,22 @@
           <a:lstStyle/>
           <a:p>
             <a:r>
-              <a:t>Timing: approximately 9:30.</a:t>
-            </a:r>
-          </a:p>
-          <a:p/>
+              <a:t>Timing: approximately 9:00.</a:t>
+            </a:r>
+          </a:p>
           <a:p>
             <a:r>
               <a:t>Progressive reveal, one prompt at a time.</a:t>
             </a:r>
           </a:p>
-          <a:p/>
-          <a:p>
-            <a:r>
-              <a:t>These are for the internal hiring conversation. Listen for concrete work, not</a:t>
-            </a:r>
-          </a:p>
-          <a:p>
-            <a:r>
-              <a:t>encouraging adjectives.</a:t>
+          <a:p>
+            <a:r>
+              <a:t>These are for the internal hiring conversation. Listen for concrete work, not encouraging adjectives.</a:t>
+            </a:r>
+          </a:p>
+          <a:p>
+            <a:r>
+              <a:t>Stay with this slide through the organizational read and the limits section: what the answers say about the opportunity's design, why an internal move can fail even when the person is capable, the same three questions applied to an external offer, and the health, safety, harassment, discrimination, caregiving, location, immigration, energy and timing boundaries. Presenter carries all of it; no new slide.</a:t>
             </a:r>
           </a:p>
         </p:txBody>
@@ -703,29 +688,17 @@
           <a:lstStyle/>
           <a:p>
             <a:r>
-              <a:t>Timing: approximately 11:20.</a:t>
-            </a:r>
-          </a:p>
-          <a:p/>
-          <a:p>
-            <a:r>
-              <a:t>Simple CTA card. No competing offer on screen. Do not add Keep the Proof or the</a:t>
-            </a:r>
-          </a:p>
-          <a:p>
-            <a:r>
-              <a:t>Capability Formation Field Kit.</a:t>
-            </a:r>
-          </a:p>
-          <a:p/>
-          <a:p>
-            <a:r>
-              <a:t>PUBLICATION GATE: temidayoafonja.com/career-decisions is not live yet. The page</a:t>
-            </a:r>
-          </a:p>
-          <a:p>
-            <a:r>
-              <a:t>must exist before Video 5 is published.</a:t>
+              <a:t>Timing: approximately 11:17.</a:t>
+            </a:r>
+          </a:p>
+          <a:p>
+            <a:r>
+              <a:t>Simple CTA card. No competing offer on screen. Do not add Keep the Proof, the Capability Formation Field Kit or the Career Evidence Starter.</a:t>
+            </a:r>
+          </a:p>
+          <a:p>
+            <a:r>
+              <a:t>CTA PRODUCTION GATE: SATISFIED. temidayoafonja.com/career-decisions is live and the core production journey has been verified. Video 5 is not blocked on it. Retain one normal signed-out link check in the final upload SOP.</a:t>
             </a:r>
           </a:p>
         </p:txBody>
@@ -795,24 +768,22 @@
           <a:lstStyle/>
           <a:p>
             <a:r>
-              <a:t>Timing: final 15 to 20 seconds.</a:t>
-            </a:r>
-          </a:p>
-          <a:p/>
-          <a:p>
-            <a:r>
-              <a:t>All content is held left of x=1130 so the right side stays clear for YouTube</a:t>
-            </a:r>
-          </a:p>
-          <a:p>
-            <a:r>
-              <a:t>end-screen elements.</a:t>
-            </a:r>
-          </a:p>
-          <a:p/>
-          <a:p>
-            <a:r>
-              <a:t>Closing line: you may not need to leave, but you do need different work.</a:t>
+              <a:t>Timing: approximately 11:45 to the end, about 12:09.</a:t>
+            </a:r>
+          </a:p>
+          <a:p>
+            <a:r>
+              <a:t>All content is held left of x=1130 so the right side stays clear for YouTube end-screen elements.</a:t>
+            </a:r>
+          </a:p>
+          <a:p>
+            <a:r>
+              <a:t>Watch next is Video 6, Are You Growing—or Just Being Given More Work? Use direct end-screen routing once Video 6 is public; before that, the Career Portability playlist. Do not leave Subscribe as the only end-screen element.</a:t>
+            </a:r>
+          </a:p>
+          <a:p>
+            <a:r>
+              <a:t>Closing lines: you may not need to leave, but the next move should increase what you can carry.</a:t>
             </a:r>
           </a:p>
         </p:txBody>
@@ -882,24 +853,22 @@
           <a:lstStyle/>
           <a:p>
             <a:r>
-              <a:t>Timing: approximately 0:38.</a:t>
-            </a:r>
-          </a:p>
-          <a:p/>
-          <a:p>
-            <a:r>
-              <a:t>Reveal one question at a time as each is named. These are the three tests the</a:t>
-            </a:r>
-          </a:p>
-          <a:p>
-            <a:r>
-              <a:t>whole video runs on, so let each land before the next arrives.</a:t>
-            </a:r>
-          </a:p>
-          <a:p/>
+              <a:t>Timing: approximately 1:58.</a:t>
+            </a:r>
+          </a:p>
+          <a:p>
+            <a:r>
+              <a:t>Reveal one question at a time as each is named. These are the three tests the whole video runs on, so let each land before the next arrives.</a:t>
+            </a:r>
+          </a:p>
           <a:p>
             <a:r>
               <a:t>Do not put the answers here. The questions alone.</a:t>
+            </a:r>
+          </a:p>
+          <a:p>
+            <a:r>
+              <a:t>Do not add an acronym or a second framework. The three questions are the only memory device in this video.</a:t>
             </a:r>
           </a:p>
         </p:txBody>
@@ -969,24 +938,17 @@
           <a:lstStyle/>
           <a:p>
             <a:r>
-              <a:t>Timing: approximately 2:35 to 4:40.</a:t>
-            </a:r>
-          </a:p>
-          <a:p/>
+              <a:t>Timing: approximately 2:14, holding to about 2:38.</a:t>
+            </a:r>
+          </a:p>
           <a:p>
             <a:r>
               <a:t>Section break. Hold briefly, then return to presenter.</a:t>
             </a:r>
           </a:p>
-          <a:p/>
-          <a:p>
-            <a:r>
-              <a:t>The point being carried: do not begin with the title. Ask what will actually be</a:t>
-            </a:r>
-          </a:p>
-          <a:p>
-            <a:r>
-              <a:t>different on an ordinary Monday.</a:t>
+          <a:p>
+            <a:r>
+              <a:t>The point being carried: do not begin with the title. Ask what will actually be different on an ordinary Monday.</a:t>
             </a:r>
           </a:p>
         </p:txBody>
@@ -1056,24 +1018,22 @@
           <a:lstStyle/>
           <a:p>
             <a:r>
-              <a:t>Timing: approximately 3:05.</a:t>
-            </a:r>
-          </a:p>
-          <a:p/>
+              <a:t>Timing: approximately 2:38.</a:t>
+            </a:r>
+          </a:p>
           <a:p>
             <a:r>
               <a:t>Reveal one line at a time as each is named.</a:t>
             </a:r>
           </a:p>
-          <a:p/>
-          <a:p>
-            <a:r>
-              <a:t>These are the four things to look for before calling a move real access. If</a:t>
-            </a:r>
-          </a:p>
-          <a:p>
-            <a:r>
-              <a:t>none of them can be named, the first answer may be no.</a:t>
+          <a:p>
+            <a:r>
+              <a:t>These are the four things to look for before calling a move real access. If none of them can be named, the first answer may be no.</a:t>
+            </a:r>
+          </a:p>
+          <a:p>
+            <a:r>
+              <a:t>Stay on this slide through the recognition passage: familiarity can hide a weak move, and sometimes the organizational problem is not capability but recognition. Do not build a new graphic for it and do not imply discrimination or deliberate resistance.</a:t>
             </a:r>
           </a:p>
         </p:txBody>
@@ -1143,24 +1103,17 @@
           <a:lstStyle/>
           <a:p>
             <a:r>
-              <a:t>Timing: approximately 4:40 to 6:45.</a:t>
-            </a:r>
-          </a:p>
-          <a:p/>
+              <a:t>Timing: approximately 4:32, holding to about 4:39.</a:t>
+            </a:r>
+          </a:p>
           <a:p>
             <a:r>
               <a:t>Section break.</a:t>
             </a:r>
           </a:p>
-          <a:p/>
-          <a:p>
-            <a:r>
-              <a:t>This is where more responsibility can be misleading. More volume is not more</a:t>
-            </a:r>
-          </a:p>
-          <a:p>
-            <a:r>
-              <a:t>judgment.</a:t>
+          <a:p>
+            <a:r>
+              <a:t>This is where more responsibility can be misleading. More volume is not more judgment.</a:t>
             </a:r>
           </a:p>
         </p:txBody>
@@ -1230,29 +1183,22 @@
           <a:lstStyle/>
           <a:p>
             <a:r>
-              <a:t>Timing: approximately 5:05.</a:t>
-            </a:r>
-          </a:p>
-          <a:p/>
+              <a:t>Timing: approximately 4:39.</a:t>
+            </a:r>
+          </a:p>
           <a:p>
             <a:r>
               <a:t>Show MORE TASKS first, on its own, while the point about volume is made.</a:t>
             </a:r>
           </a:p>
-          <a:p/>
-          <a:p>
-            <a:r>
-              <a:t>Then contrast with MORE JUDGMENT and let it carry the weight. Neither example</a:t>
-            </a:r>
-          </a:p>
-          <a:p>
-            <a:r>
-              <a:t>makes the operational task unimportant. The distinction is what the work is</a:t>
-            </a:r>
-          </a:p>
-          <a:p>
-            <a:r>
-              <a:t>forming.</a:t>
+          <a:p>
+            <a:r>
+              <a:t>Then contrast with MORE JUDGMENT and let it carry the weight. Neither example makes the operational task unimportant. The distinction is what the work is forming.</a:t>
+            </a:r>
+          </a:p>
+          <a:p>
+            <a:r>
+              <a:t>Hold long enough to cover the authority point and the organizational line: a stretch opportunity is developmental when the person is trusted with more judgment, not simply handed more volume.</a:t>
             </a:r>
           </a:p>
         </p:txBody>
@@ -1322,24 +1268,17 @@
           <a:lstStyle/>
           <a:p>
             <a:r>
-              <a:t>Timing: approximately 6:45 to 8:50.</a:t>
-            </a:r>
-          </a:p>
-          <a:p/>
+              <a:t>Timing: approximately 6:40, holding to about 7:00.</a:t>
+            </a:r>
+          </a:p>
           <a:p>
             <a:r>
               <a:t>Section break.</a:t>
             </a:r>
           </a:p>
-          <a:p/>
-          <a:p>
-            <a:r>
-              <a:t>Internal credibility can be powerful inside one company and almost invisible</a:t>
-            </a:r>
-          </a:p>
-          <a:p>
-            <a:r>
-              <a:t>outside it. Portable evidence does not mean taking confidential material.</a:t>
+          <a:p>
+            <a:r>
+              <a:t>Internal credibility can be powerful inside one company and surprisingly difficult to explain outside it. Portable evidence does not mean taking confidential material.</a:t>
             </a:r>
           </a:p>
         </p:txBody>
@@ -1409,16 +1348,14 @@
           <a:lstStyle/>
           <a:p>
             <a:r>
-              <a:t>Timing: approximately 7:30.</a:t>
-            </a:r>
-          </a:p>
-          <a:p/>
+              <a:t>Timing: approximately 7:00.</a:t>
+            </a:r>
+          </a:p>
           <a:p>
             <a:r>
               <a:t>Reveal Result, Judgment and Range sequentially.</a:t>
             </a:r>
           </a:p>
-          <a:p/>
           <a:p>
             <a:r>
               <a:t>A move becomes more portable when it creates all three.</a:t>
@@ -1491,35 +1428,22 @@
           <a:lstStyle/>
           <a:p>
             <a:r>
-              <a:t>Timing: approximately 8:50.</a:t>
-            </a:r>
-          </a:p>
-          <a:p/>
-          <a:p>
-            <a:r>
-              <a:t>Reveal rows one at a time.</a:t>
-            </a:r>
-          </a:p>
-          <a:p/>
-          <a:p>
-            <a:r>
-              <a:t>Two yeses is not a rejection. Identify the missing dimension and investigate</a:t>
-            </a:r>
-          </a:p>
-          <a:p>
-            <a:r>
-              <a:t>whether it can be designed into the move.</a:t>
-            </a:r>
-          </a:p>
-          <a:p/>
-          <a:p>
-            <a:r>
-              <a:t>Zero or one yes may still be the right choice for pay, flexibility, stability</a:t>
-            </a:r>
-          </a:p>
-          <a:p>
-            <a:r>
-              <a:t>or a better manager. Just not a formation case.</a:t>
+              <a:t>Timing: approximately 8:00.</a:t>
+            </a:r>
+          </a:p>
+          <a:p>
+            <a:r>
+              <a:t>Reveal rows one at a time. Do not gamify the read.</a:t>
+            </a:r>
+          </a:p>
+          <a:p>
+            <a:r>
+              <a:t>Two yeses is not a rejection. Identify the missing dimension and investigate whether it can be designed into the move.</a:t>
+            </a:r>
+          </a:p>
+          <a:p>
+            <a:r>
+              <a:t>Zero or one yes may still be the right choice for pay, flexibility, stability, benefits or a better manager. Just not a formation case.</a:t>
             </a:r>
           </a:p>
         </p:txBody>

--- a/deliverables/video-5-slides/out/Video_5_Main_Slides.pptx
+++ b/deliverables/video-5-slides/out/Video_5_Main_Slides.pptx
@@ -513,12 +513,12 @@
           <a:lstStyle/>
           <a:p>
             <a:r>
-              <a:t>Timing: approximately 0:38.</a:t>
-            </a:r>
-          </a:p>
-          <a:p>
-            <a:r>
-              <a:t>Bring this up only after the H.I.T. opening has fully landed: the hook, SAME COMPANY / DIFFERENT WORK, the maternity-return proof and the three questions.</a:t>
+              <a:t>Timing: approximately 0:46.</a:t>
+            </a:r>
+          </a:p>
+          <a:p>
+            <a:r>
+              <a:t>Bring this up only after the H.I.T. opening has fully landed: the hook, SAME COMPANY / DIFFERENT WORK, "Let me show you what this looked like for me" and the maternity-return proof, then the three questions.</a:t>
             </a:r>
           </a:p>
           <a:p>
@@ -533,7 +533,12 @@
           </a:p>
           <a:p>
             <a:r>
-              <a:t>Hold through the organizational turn that follows — an internal move is also a decision the organization is making about what it will trust this person to do next. That passage is carried by Temidayo on camera, not by a new slide.</a:t>
+              <a:t>Direct address: this section carries the one channel-positioning sentence about experienced professionals, and then returns immediately to "you." Hold on Temidayo through "And I want to help you do the same here" — do not cover it with a graphic.</a:t>
+            </a:r>
+          </a:p>
+          <a:p>
+            <a:r>
+              <a:t>Hold through the organizational turn that follows: an internal move is also a decision about what the viewer's organization is willing to trust them to do next. Temidayo carries that on camera; no new slide.</a:t>
             </a:r>
           </a:p>
         </p:txBody>
@@ -603,7 +608,7 @@
           <a:lstStyle/>
           <a:p>
             <a:r>
-              <a:t>Timing: approximately 9:00.</a:t>
+              <a:t>Timing: approximately 10:26.</a:t>
             </a:r>
           </a:p>
           <a:p>
@@ -613,12 +618,17 @@
           </a:p>
           <a:p>
             <a:r>
-              <a:t>These are for the internal hiring conversation. Listen for concrete work, not encouraging adjectives.</a:t>
-            </a:r>
-          </a:p>
-          <a:p>
-            <a:r>
-              <a:t>Stay with this slide through the organizational read and the limits section: what the answers say about the opportunity's design, why an internal move can fail even when the person is capable, the same three questions applied to an external offer, and the health, safety, harassment, discrimination, caregiving, location, immigration, energy and timing boundaries. Presenter carries all of it; no new slide.</a:t>
+              <a:t>These are for the viewer's internal hiring conversation. Listen for concrete work, not encouraging adjectives.</a:t>
+            </a:r>
+          </a:p>
+          <a:p>
+            <a:r>
+              <a:t>Stay with this slide through the organizational read and the limits section: what the answers say about how the opportunity is designed, that a capable person can still land in a poorly designed role, the same three questions applied to an external offer, and — from about 11:59 — the health, safety, harassment, discrimination, caregiving, location, immigration, energy and timing boundaries. Temidayo carries all of it; no new slide.</a:t>
+            </a:r>
+          </a:p>
+          <a:p>
+            <a:r>
+              <a:t>"I want you to compare which option gives you meaningful access…" is a relational beat. Do not trim it for pace.</a:t>
             </a:r>
           </a:p>
         </p:txBody>
@@ -688,12 +698,17 @@
           <a:lstStyle/>
           <a:p>
             <a:r>
-              <a:t>Timing: approximately 11:17.</a:t>
+              <a:t>Timing: approximately 12:45.</a:t>
             </a:r>
           </a:p>
           <a:p>
             <a:r>
               <a:t>Simple CTA card. No competing offer on screen. Do not add Keep the Proof, the Capability Formation Field Kit or the Career Evidence Starter.</a:t>
+            </a:r>
+          </a:p>
+          <a:p>
+            <a:r>
+              <a:t>Note the v3.1 phrasing: "I made the Career Decision Evidence Check to help you organize the evidence behind that choice." It is offered, not announced. Keep it that way.</a:t>
             </a:r>
           </a:p>
           <a:p>
@@ -768,7 +783,7 @@
           <a:lstStyle/>
           <a:p>
             <a:r>
-              <a:t>Timing: approximately 11:45 to the end, about 12:09.</a:t>
+              <a:t>Timing: approximately 13:14 to the end, about 13:39.</a:t>
             </a:r>
           </a:p>
           <a:p>
@@ -783,7 +798,7 @@
           </a:p>
           <a:p>
             <a:r>
-              <a:t>Closing lines: you may not need to leave, but the next move should increase what you can carry.</a:t>
+              <a:t>Closing lines are spoken to one person: "You may not need to leave. But your next move should increase what you can carry." Stay on Temidayo for both.</a:t>
             </a:r>
           </a:p>
         </p:txBody>
@@ -853,7 +868,7 @@
           <a:lstStyle/>
           <a:p>
             <a:r>
-              <a:t>Timing: approximately 1:58.</a:t>
+              <a:t>Timing: approximately 2:19.</a:t>
             </a:r>
           </a:p>
           <a:p>
@@ -938,7 +953,7 @@
           <a:lstStyle/>
           <a:p>
             <a:r>
-              <a:t>Timing: approximately 2:14, holding to about 2:38.</a:t>
+              <a:t>Timing: approximately 2:37, holding to about 3:04.</a:t>
             </a:r>
           </a:p>
           <a:p>
@@ -948,7 +963,7 @@
           </a:p>
           <a:p>
             <a:r>
-              <a:t>The point being carried: do not begin with the title. Ask what will actually be different on an ordinary Monday.</a:t>
+              <a:t>The point being carried: do not start with the title. Temidayo asks the viewer to picture an ordinary Monday in the new role and say what would actually be different. Those are direct questions to one person — keep them attached to her face.</a:t>
             </a:r>
           </a:p>
         </p:txBody>
@@ -1018,7 +1033,7 @@
           <a:lstStyle/>
           <a:p>
             <a:r>
-              <a:t>Timing: approximately 2:38.</a:t>
+              <a:t>Timing: approximately 3:04.</a:t>
             </a:r>
           </a:p>
           <a:p>
@@ -1028,12 +1043,17 @@
           </a:p>
           <a:p>
             <a:r>
-              <a:t>These are the four things to look for before calling a move real access. If none of them can be named, the first answer may be no.</a:t>
-            </a:r>
-          </a:p>
-          <a:p>
-            <a:r>
-              <a:t>Stay on this slide through the recognition passage: familiarity can hide a weak move, and sometimes the organizational problem is not capability but recognition. Do not build a new graphic for it and do not imply discrimination or deliberate resistance.</a:t>
+              <a:t>These are the four places to look for change before calling a move real access.</a:t>
+            </a:r>
+          </a:p>
+          <a:p>
+            <a:r>
+              <a:t>Stay on this slide through the recognition passage at about 3:49: familiarity can make a weak move look stronger than it is, and the problem may not be the viewer's capability but whether people can see them beyond the work they are already known for. Do not build a new graphic for it, and do not imply discrimination or deliberate resistance.</a:t>
+            </a:r>
+          </a:p>
+          <a:p>
+            <a:r>
+              <a:t>Also carried here: the limit. A move that does not change the work may still be right for pay, flexibility, a better manager or stability. Temidayo names those as legitimate. Do not cut the qualifier.</a:t>
             </a:r>
           </a:p>
         </p:txBody>
@@ -1103,7 +1123,7 @@
           <a:lstStyle/>
           <a:p>
             <a:r>
-              <a:t>Timing: approximately 4:32, holding to about 4:39.</a:t>
+              <a:t>Timing: approximately 5:24, holding to about 5:33.</a:t>
             </a:r>
           </a:p>
           <a:p>
@@ -1113,7 +1133,7 @@
           </a:p>
           <a:p>
             <a:r>
-              <a:t>This is where more responsibility can be misleading. More volume is not more judgment.</a:t>
+              <a:t>This is where Temidayo asks the viewer to be careful with the phrase "more responsibility." More volume is not more judgment.</a:t>
             </a:r>
           </a:p>
         </p:txBody>
@@ -1183,7 +1203,7 @@
           <a:lstStyle/>
           <a:p>
             <a:r>
-              <a:t>Timing: approximately 4:39.</a:t>
+              <a:t>Timing: approximately 5:33.</a:t>
             </a:r>
           </a:p>
           <a:p>
@@ -1193,12 +1213,17 @@
           </a:p>
           <a:p>
             <a:r>
-              <a:t>Then contrast with MORE JUDGMENT and let it carry the weight. Neither example makes the operational task unimportant. The distinction is what the work is forming.</a:t>
-            </a:r>
-          </a:p>
-          <a:p>
-            <a:r>
-              <a:t>Hold long enough to cover the authority point and the organizational line: a stretch opportunity is developmental when the person is trusted with more judgment, not simply handed more volume.</a:t>
+              <a:t>Then contrast with MORE JUDGMENT and let it carry the weight. Temidayo is explicit that she is not saying the operational task does not matter — she is asking what the work is forming in the viewer. Keep that distinction intact.</a:t>
+            </a:r>
+          </a:p>
+          <a:p>
+            <a:r>
+              <a:t>Hold long enough to cover the authority point and the organizational line: a stretch opportunity becomes developmental when the viewer is trusted with more judgment, not simply handed more volume.</a:t>
+            </a:r>
+          </a:p>
+          <a:p>
+            <a:r>
+              <a:t>"So here is what I would ask you" is a relational beat. Stay on Temidayo.</a:t>
             </a:r>
           </a:p>
         </p:txBody>
@@ -1268,7 +1293,7 @@
           <a:lstStyle/>
           <a:p>
             <a:r>
-              <a:t>Timing: approximately 6:40, holding to about 7:00.</a:t>
+              <a:t>Timing: approximately 7:43, holding to about 8:07.</a:t>
             </a:r>
           </a:p>
           <a:p>
@@ -1278,7 +1303,7 @@
           </a:p>
           <a:p>
             <a:r>
-              <a:t>Internal credibility can be powerful inside one company and surprisingly difficult to explain outside it. Portable evidence does not mean taking confidential material.</a:t>
+              <a:t>The viewer's credibility inside the company may not automatically make sense outside it. Portable evidence does not mean taking confidential material.</a:t>
             </a:r>
           </a:p>
         </p:txBody>
@@ -1348,7 +1373,7 @@
           <a:lstStyle/>
           <a:p>
             <a:r>
-              <a:t>Timing: approximately 7:00.</a:t>
+              <a:t>Timing: approximately 8:07.</a:t>
             </a:r>
           </a:p>
           <a:p>
@@ -1358,7 +1383,7 @@
           </a:p>
           <a:p>
             <a:r>
-              <a:t>A move becomes more portable when it creates all three.</a:t>
+              <a:t>A move becomes more portable when it creates all three. "I want you to be able to say…" is spoken to one person — do not cut away from her for it.</a:t>
             </a:r>
           </a:p>
         </p:txBody>
@@ -1428,7 +1453,7 @@
           <a:lstStyle/>
           <a:p>
             <a:r>
-              <a:t>Timing: approximately 8:00.</a:t>
+              <a:t>Timing: approximately 9:11.</a:t>
             </a:r>
           </a:p>
           <a:p>
@@ -1438,12 +1463,12 @@
           </a:p>
           <a:p>
             <a:r>
-              <a:t>Two yeses is not a rejection. Identify the missing dimension and investigate whether it can be designed into the move.</a:t>
-            </a:r>
-          </a:p>
-          <a:p>
-            <a:r>
-              <a:t>Zero or one yes may still be the right choice for pay, flexibility, stability, benefits or a better manager. Just not a formation case.</a:t>
+              <a:t>Two yeses is not a rejection. Temidayo gives the viewer the concrete questions to ask about the missing dimension.</a:t>
+            </a:r>
+          </a:p>
+          <a:p>
+            <a:r>
+              <a:t>Zero or one yes may still be exactly the right choice for pay, flexibility, stability, benefits or a better manager. Keep "you do not have to call every useful move growth" — it is the closing line of this section.</a:t>
             </a:r>
           </a:p>
         </p:txBody>

--- a/deliverables/video-5-slides/out/Video_5_Main_Slides.pptx
+++ b/deliverables/video-5-slides/out/Video_5_Main_Slides.pptx
@@ -708,7 +708,7 @@
           </a:p>
           <a:p>
             <a:r>
-              <a:t>Note the v3.1 phrasing: "I made the Career Decision Evidence Check to help you organize the evidence behind that choice." It is offered, not announced. Keep it that way.</a:t>
+              <a:t>Note the v4.0 phrasing: "I made the Career Decision Evidence Check to help you organize the evidence behind that choice." It is offered, not announced. Keep it that way.</a:t>
             </a:r>
           </a:p>
           <a:p>

--- a/deliverables/video-5-slides/out/Video_5_Main_Slides.pptx
+++ b/deliverables/video-5-slides/out/Video_5_Main_Slides.pptx
@@ -513,32 +513,32 @@
           <a:lstStyle/>
           <a:p>
             <a:r>
-              <a:t>Timing: approximately 0:46.</a:t>
-            </a:r>
-          </a:p>
-          <a:p>
-            <a:r>
-              <a:t>Bring this up only after the H.I.T. opening has fully landed: the hook, SAME COMPANY / DIFFERENT WORK, "Let me show you what this looked like for me" and the maternity-return proof, then the three questions.</a:t>
-            </a:r>
-          </a:p>
-          <a:p>
-            <a:r>
-              <a:t>State one holds the main statement. Reveal the INTERNAL MOVE ≠ AUTOMATIC GROWTH line after the first statement has been made.</a:t>
-            </a:r>
-          </a:p>
-          <a:p>
-            <a:r>
-              <a:t>The not-equal sign is drawn rather than typeset: no brand font contains that glyph.</a:t>
-            </a:r>
-          </a:p>
-          <a:p>
-            <a:r>
-              <a:t>Direct address: this section carries the one channel-positioning sentence about experienced professionals, and then returns immediately to "you." Hold on Temidayo through "And I want to help you do the same here" — do not cover it with a graphic.</a:t>
-            </a:r>
-          </a:p>
-          <a:p>
-            <a:r>
-              <a:t>Hold through the organizational turn that follows: an internal move is also a decision about what the viewer's organization is willing to trust them to do next. Temidayo carries that on camera; no new slide.</a:t>
+              <a:t>Timing: approximately 0:38.</a:t>
+            </a:r>
+          </a:p>
+          <a:p>
+            <a:r>
+              <a:t>Do NOT open on this slide. Begin full-screen on Temidayo and let the opening land: doing well and browsing job adverts anyway, the assumption underneath it, the reframe, and the offer.</a:t>
+            </a:r>
+          </a:p>
+          <a:p>
+            <a:r>
+              <a:t>Then this slide carries the proof.</a:t>
+            </a:r>
+          </a:p>
+          <a:p>
+            <a:r>
+              <a:t>FACTUAL BOUNDARY, exact: about six months after Temidayo came back from maternity leave in one chapter of her career, her scope expanded beyond the original box of the role. The meaningful part was being trusted with DIFFERENT work, not more of the same. No employer, assignment, result, promotion, metric or conversation. NO maternity or baby imagery — the proof is her saying what happened.</a:t>
+            </a:r>
+          </a:p>
+          <a:p>
+            <a:r>
+              <a:t>"More landed on me. That part is easy to describe. But that is not the part that mattered." Stay on her face for it.</a:t>
+            </a:r>
+          </a:p>
+          <a:p>
+            <a:r>
+              <a:t>State one holds the main statement; reveal INTERNAL MOVE ≠ AUTOMATIC GROWTH after it. The not-equal sign is drawn, not typeset — no brand font has the glyph.</a:t>
             </a:r>
           </a:p>
         </p:txBody>
@@ -608,27 +608,37 @@
           <a:lstStyle/>
           <a:p>
             <a:r>
-              <a:t>Timing: approximately 10:26.</a:t>
-            </a:r>
-          </a:p>
-          <a:p>
-            <a:r>
-              <a:t>Progressive reveal, one prompt at a time.</a:t>
-            </a:r>
-          </a:p>
-          <a:p>
-            <a:r>
-              <a:t>These are for the viewer's internal hiring conversation. Listen for concrete work, not encouraging adjectives.</a:t>
-            </a:r>
-          </a:p>
-          <a:p>
-            <a:r>
-              <a:t>Stay with this slide through the organizational read and the limits section: what the answers say about how the opportunity is designed, that a capable person can still land in a poorly designed role, the same three questions applied to an external offer, and — from about 11:59 — the health, safety, harassment, discrimination, caregiving, location, immigration, energy and timing boundaries. Temidayo carries all of it; no new slide.</a:t>
-            </a:r>
-          </a:p>
-          <a:p>
-            <a:r>
-              <a:t>"I want you to compare which option gives you meaningful access…" is a relational beat. Do not trim it for pace.</a:t>
+              <a:t>Timing: approximately 9:08.</a:t>
+            </a:r>
+          </a:p>
+          <a:p>
+            <a:r>
+              <a:t>Progressive reveal, one prompt at a time. Then Temidayo carries a long stretch on camera — no new slide for any of it.</a:t>
+            </a:r>
+          </a:p>
+          <a:p>
+            <a:r>
+              <a:t>What the answers say about the organisation. Being capable and still landing in a badly designed role. The same three questions applied to an external offer. When an internal move will not fix the problem.</a:t>
+            </a:r>
+          </a:p>
+          <a:p>
+            <a:r>
+              <a:t>THE SAFETY BOUNDARY sits here and is not optional: if health or safety is at risk, or the viewer is dealing with harassment or discrimination, they do not need a mobility strategy — they need to protect themselves and get proper support. Deliver it plainly, on camera, with captions. Not fine print.</a:t>
+            </a:r>
+          </a:p>
+          <a:p>
+            <a:r>
+              <a:t>Then the life factors: pay, caregiving, location, immigration status, energy, timing.</a:t>
+            </a:r>
+          </a:p>
+          <a:p>
+            <a:r>
+              <a:t>IDENTITY EXIT, at about 11:06: "I want you to be able to read any opportunity — inside or outside — for what it will actually build in you… Once you can do that, you stop needing anyone to tell you whether an opportunity is good. You can see it yourself."</a:t>
+            </a:r>
+          </a:p>
+          <a:p>
+            <a:r>
+              <a:t>That last sentence is the point of the video. If the edit runs long, cut something else.</a:t>
             </a:r>
           </a:p>
         </p:txBody>
@@ -698,22 +708,27 @@
           <a:lstStyle/>
           <a:p>
             <a:r>
-              <a:t>Timing: approximately 12:45.</a:t>
-            </a:r>
-          </a:p>
-          <a:p>
-            <a:r>
-              <a:t>Simple CTA card. No competing offer on screen. Do not add Keep the Proof, the Capability Formation Field Kit or the Career Evidence Starter.</a:t>
-            </a:r>
-          </a:p>
-          <a:p>
-            <a:r>
-              <a:t>Note the v4.0 phrasing: "I made the Career Decision Evidence Check to help you organize the evidence behind that choice." It is offered, not announced. Keep it that way.</a:t>
-            </a:r>
-          </a:p>
-          <a:p>
-            <a:r>
-              <a:t>CTA PRODUCTION GATE: SATISFIED. temidayoafonja.com/career-decisions is live and the core production journey has been verified. Video 5 is not blocked on it. Retain one normal signed-out link check in the final upload SOP.</a:t>
+              <a:t>Timing: approximately 11:33.</a:t>
+            </a:r>
+          </a:p>
+          <a:p>
+            <a:r>
+              <a:t>Calm and brief. The only invitation in the video, and it is the Career Decision Evidence Check — not the Field Kit, not Keep the Proof, not the Starter.</a:t>
+            </a:r>
+          </a:p>
+          <a:p>
+            <a:r>
+              <a:t>It lands AFTER the identity bridge. Keep that order.</a:t>
+            </a:r>
+          </a:p>
+          <a:p>
+            <a:r>
+              <a:t>The one-sentence exercise comes first, then the offer: "I made the Career Decision Evidence Check to help you organise the evidence behind that choice." Offered, not announced.</a:t>
+            </a:r>
+          </a:p>
+          <a:p>
+            <a:r>
+              <a:t>CTA PRODUCTION GATE: SATISFIED. Retain one signed-out link check in the final upload SOP.</a:t>
             </a:r>
           </a:p>
         </p:txBody>
@@ -783,12 +798,12 @@
           <a:lstStyle/>
           <a:p>
             <a:r>
-              <a:t>Timing: approximately 13:14 to the end, about 13:39.</a:t>
-            </a:r>
-          </a:p>
-          <a:p>
-            <a:r>
-              <a:t>All content is held left of x=1130 so the right side stays clear for YouTube end-screen elements.</a:t>
+              <a:t>Timing: approximately 12:01 to the end, about 12:26.</a:t>
+            </a:r>
+          </a:p>
+          <a:p>
+            <a:r>
+              <a:t>All content is held left of x=1130 so the right side stays clear for the YouTube end-screen element.</a:t>
             </a:r>
           </a:p>
           <a:p>
@@ -798,7 +813,12 @@
           </a:p>
           <a:p>
             <a:r>
-              <a:t>Closing lines are spoken to one person: "You may not need to leave. But your next move should increase what you can carry." Stay on Temidayo for both.</a:t>
+              <a:t>Closing lines: "You may not need to leave. But the next move should increase what you can carry." Stay on her for both.</a:t>
+            </a:r>
+          </a:p>
+          <a:p>
+            <a:r>
+              <a:t>Hold the final frame for at least 12 seconds.</a:t>
             </a:r>
           </a:p>
         </p:txBody>
@@ -868,22 +888,22 @@
           <a:lstStyle/>
           <a:p>
             <a:r>
-              <a:t>Timing: approximately 2:19.</a:t>
-            </a:r>
-          </a:p>
-          <a:p>
-            <a:r>
-              <a:t>Reveal one question at a time as each is named. These are the three tests the whole video runs on, so let each land before the next arrives.</a:t>
-            </a:r>
-          </a:p>
-          <a:p>
-            <a:r>
-              <a:t>Do not put the answers here. The questions alone.</a:t>
-            </a:r>
-          </a:p>
-          <a:p>
-            <a:r>
-              <a:t>Do not add an acronym or a second framework. The three questions are the only memory device in this video.</a:t>
+              <a:t>Timing: approximately 1:18.</a:t>
+            </a:r>
+          </a:p>
+          <a:p>
+            <a:r>
+              <a:t>The channel line and the three questions.</a:t>
+            </a:r>
+          </a:p>
+          <a:p>
+            <a:r>
+              <a:t>Reveal one question at a time. These are the only memory device in the video — no acronym, no second framework, and CAR belongs to Video 6.</a:t>
+            </a:r>
+          </a:p>
+          <a:p>
+            <a:r>
+              <a:t>Close on the reframe: the point is not whether you moved, it is whether the move increased what you can carry afterwards.</a:t>
             </a:r>
           </a:p>
         </p:txBody>
@@ -953,17 +973,17 @@
           <a:lstStyle/>
           <a:p>
             <a:r>
-              <a:t>Timing: approximately 2:37, holding to about 3:04.</a:t>
-            </a:r>
-          </a:p>
-          <a:p>
-            <a:r>
-              <a:t>Section break. Hold briefly, then return to presenter.</a:t>
-            </a:r>
-          </a:p>
-          <a:p>
-            <a:r>
-              <a:t>The point being carried: do not start with the title. Temidayo asks the viewer to picture an ordinary Monday in the new role and say what would actually be different. Those are direct questions to one person — keep them attached to her face.</a:t>
+              <a:t>Timing: approximately 1:49, holding to about 2:24.</a:t>
+            </a:r>
+          </a:p>
+          <a:p>
+            <a:r>
+              <a:t>Section break, then straight into the first question.</a:t>
+            </a:r>
+          </a:p>
+          <a:p>
+            <a:r>
+              <a:t>The instruction is vivid and specific: picture an ordinary Monday four months in, not the announcement and not the first week. Keep that framing — it is what stops the viewer answering about the title.</a:t>
             </a:r>
           </a:p>
         </p:txBody>
@@ -1033,27 +1053,27 @@
           <a:lstStyle/>
           <a:p>
             <a:r>
-              <a:t>Timing: approximately 3:04.</a:t>
-            </a:r>
-          </a:p>
-          <a:p>
-            <a:r>
-              <a:t>Reveal one line at a time as each is named.</a:t>
-            </a:r>
-          </a:p>
-          <a:p>
-            <a:r>
-              <a:t>These are the four places to look for change before calling a move real access.</a:t>
-            </a:r>
-          </a:p>
-          <a:p>
-            <a:r>
-              <a:t>Stay on this slide through the recognition passage at about 3:49: familiarity can make a weak move look stronger than it is, and the problem may not be the viewer's capability but whether people can see them beyond the work they are already known for. Do not build a new graphic for it, and do not imply discrimination or deliberate resistance.</a:t>
-            </a:r>
-          </a:p>
-          <a:p>
-            <a:r>
-              <a:t>Also carried here: the limit. A move that does not change the work may still be right for pay, flexibility, a better manager or stability. Temidayo names those as legitimate. Do not cut the qualifier.</a:t>
+              <a:t>Timing: approximately 2:24.</a:t>
+            </a:r>
+          </a:p>
+          <a:p>
+            <a:r>
+              <a:t>Reveal the four access variables one at a time.</a:t>
+            </a:r>
+          </a:p>
+          <a:p>
+            <a:r>
+              <a:t>Not all four are required. Familiarity is named as an advantage before it is named as a risk — keep that order, it is what makes the section fair.</a:t>
+            </a:r>
+          </a:p>
+          <a:p>
+            <a:r>
+              <a:t>At about 3:20 comes the organisational beat, and it is the most delicate thing in the video: the people who value you most may be the ones least able to imagine you doing something else, because every time you were excellent in one shape you made that shape more convincing. "That is not them being unfair." Do not let an edit turn this into a grievance.</a:t>
+            </a:r>
+          </a:p>
+          <a:p>
+            <a:r>
+              <a:t>Then the questions to ask, then the limit: a move that does not change the work can still be right. "I just do not want you calling it development when it is relief. Both are allowed." Do not cut that.</a:t>
             </a:r>
           </a:p>
         </p:txBody>
@@ -1123,17 +1143,12 @@
           <a:lstStyle/>
           <a:p>
             <a:r>
-              <a:t>Timing: approximately 5:24, holding to about 5:33.</a:t>
-            </a:r>
-          </a:p>
-          <a:p>
-            <a:r>
-              <a:t>Section break.</a:t>
-            </a:r>
-          </a:p>
-          <a:p>
-            <a:r>
-              <a:t>This is where Temidayo asks the viewer to be careful with the phrase "more responsibility." More volume is not more judgment.</a:t>
+              <a:t>Timing: approximately 4:33, holding to about 4:41.</a:t>
+            </a:r>
+          </a:p>
+          <a:p>
+            <a:r>
+              <a:t>Section break. Hold briefly, then back to presenter.</a:t>
             </a:r>
           </a:p>
         </p:txBody>
@@ -1203,27 +1218,22 @@
           <a:lstStyle/>
           <a:p>
             <a:r>
-              <a:t>Timing: approximately 5:33.</a:t>
-            </a:r>
-          </a:p>
-          <a:p>
-            <a:r>
-              <a:t>Show MORE TASKS first, on its own, while the point about volume is made.</a:t>
-            </a:r>
-          </a:p>
-          <a:p>
-            <a:r>
-              <a:t>Then contrast with MORE JUDGMENT and let it carry the weight. Temidayo is explicit that she is not saying the operational task does not matter — she is asking what the work is forming in the viewer. Keep that distinction intact.</a:t>
-            </a:r>
-          </a:p>
-          <a:p>
-            <a:r>
-              <a:t>Hold long enough to cover the authority point and the organizational line: a stretch opportunity becomes developmental when the viewer is trusted with more judgment, not simply handed more volume.</a:t>
-            </a:r>
-          </a:p>
-          <a:p>
-            <a:r>
-              <a:t>"So here is what I would ask you" is a relational beat. Stay on Temidayo.</a:t>
+              <a:t>Timing: approximately 4:41.</a:t>
+            </a:r>
+          </a:p>
+          <a:p>
+            <a:r>
+              <a:t>Show MORE TASKS alone first, then bring up MORE JUDGMENT.</a:t>
+            </a:r>
+          </a:p>
+          <a:p>
+            <a:r>
+              <a:t>The authority point matters as much as the contrast: accountability without influence is "exposure without ownership, and a well-known way for capable people to end up looking worse than they are."</a:t>
+            </a:r>
+          </a:p>
+          <a:p>
+            <a:r>
+              <a:t>Then the three questions to ask the hiring manager, and the closing test — if the clearest answer is "you will have more to manage", keep asking.</a:t>
             </a:r>
           </a:p>
         </p:txBody>
@@ -1293,7 +1303,7 @@
           <a:lstStyle/>
           <a:p>
             <a:r>
-              <a:t>Timing: approximately 7:43, holding to about 8:07.</a:t>
+              <a:t>Timing: approximately 6:45, holding to about 7:09.</a:t>
             </a:r>
           </a:p>
           <a:p>
@@ -1303,7 +1313,7 @@
           </a:p>
           <a:p>
             <a:r>
-              <a:t>The viewer's credibility inside the company may not automatically make sense outside it. Portable evidence does not mean taking confidential material.</a:t>
+              <a:t>Credibility inside a company does not automatically make sense outside it. The people around the viewer watched it happen; someone else did not.</a:t>
             </a:r>
           </a:p>
         </p:txBody>
@@ -1373,17 +1383,22 @@
           <a:lstStyle/>
           <a:p>
             <a:r>
-              <a:t>Timing: approximately 8:07.</a:t>
-            </a:r>
-          </a:p>
-          <a:p>
-            <a:r>
-              <a:t>Reveal Result, Judgment and Range sequentially.</a:t>
-            </a:r>
-          </a:p>
-          <a:p>
-            <a:r>
-              <a:t>A move becomes more portable when it creates all three. "I want you to be able to say…" is spoken to one person — do not cut away from her for it.</a:t>
+              <a:t>Timing: approximately 7:09.</a:t>
+            </a:r>
+          </a:p>
+          <a:p>
+            <a:r>
+              <a:t>Reveal Result, Judgment and Range in order.</a:t>
+            </a:r>
+          </a:p>
+          <a:p>
+            <a:r>
+              <a:t>The target sentence is the one to protect: "I moved into a new context, I was trusted to make this kind of call, and here is what was different because of it." That is what a portable answer sounds like.</a:t>
+            </a:r>
+          </a:p>
+          <a:p>
+            <a:r>
+              <a:t>Close on the translation test — if you cannot say what the role could prove, you do not yet know what it will build.</a:t>
             </a:r>
           </a:p>
         </p:txBody>
@@ -1453,22 +1468,22 @@
           <a:lstStyle/>
           <a:p>
             <a:r>
-              <a:t>Timing: approximately 9:11.</a:t>
-            </a:r>
-          </a:p>
-          <a:p>
-            <a:r>
-              <a:t>Reveal rows one at a time. Do not gamify the read.</a:t>
-            </a:r>
-          </a:p>
-          <a:p>
-            <a:r>
-              <a:t>Two yeses is not a rejection. Temidayo gives the viewer the concrete questions to ask about the missing dimension.</a:t>
-            </a:r>
-          </a:p>
-          <a:p>
-            <a:r>
-              <a:t>Zero or one yes may still be exactly the right choice for pay, flexibility, stability, benefits or a better manager. Keep "you do not have to call every useful move growth" — it is the closing line of this section.</a:t>
+              <a:t>Timing: approximately 8:08.</a:t>
+            </a:r>
+          </a:p>
+          <a:p>
+            <a:r>
+              <a:t>Reveal the rows one at a time. Do NOT gamify this — no scorecard treatment, no tally graphics.</a:t>
+            </a:r>
+          </a:p>
+          <a:p>
+            <a:r>
+              <a:t>Two yeses is not a rejection; it is something specific to negotiate before accepting.</a:t>
+            </a:r>
+          </a:p>
+          <a:p>
+            <a:r>
+              <a:t>Zero or one is not a verdict either. Better pay, better hours, a better manager, stability while life is complicated — all real reasons. "Just name the trade honestly. You do not have to call every useful move growth." </a:t>
             </a:r>
           </a:p>
         </p:txBody>

--- a/deliverables/video-5-slides/out/Video_5_Main_Slides.pptx
+++ b/deliverables/video-5-slides/out/Video_5_Main_Slides.pptx
@@ -513,32 +513,47 @@
           <a:lstStyle/>
           <a:p>
             <a:r>
-              <a:t>Timing: approximately 0:38.</a:t>
-            </a:r>
-          </a:p>
-          <a:p>
-            <a:r>
-              <a:t>Do NOT open on this slide. Begin full-screen on Temidayo and let the opening land: doing well and browsing job adverts anyway, the assumption underneath it, the reframe, and the offer.</a:t>
-            </a:r>
-          </a:p>
-          <a:p>
-            <a:r>
-              <a:t>Then this slide carries the proof.</a:t>
-            </a:r>
-          </a:p>
-          <a:p>
-            <a:r>
-              <a:t>FACTUAL BOUNDARY, exact: about six months after Temidayo came back from maternity leave in one chapter of her career, her scope expanded beyond the original box of the role. The meaningful part was being trusted with DIFFERENT work, not more of the same. No employer, assignment, result, promotion, metric or conversation. NO maternity or baby imagery — the proof is her saying what happened.</a:t>
-            </a:r>
-          </a:p>
-          <a:p>
-            <a:r>
-              <a:t>"More landed on me. That part is easy to describe. But that is not the part that mattered." Stay on her face for it.</a:t>
+              <a:t>Timing: approximately 1:31.</a:t>
+            </a:r>
+          </a:p>
+          <a:p>
+            <a:r>
+              <a:t>Slide 1 — Core Distinction.</a:t>
+            </a:r>
+          </a:p>
+          <a:p>
+            <a:r>
+              <a:t>Cue — the line that lands on this slide: “I’m Temidayo Afonja.”</a:t>
+            </a:r>
+          </a:p>
+          <a:p>
+            <a:r>
+              <a:t>Do NOT open on this slide. Begin full screen on Temidayo and let the whole opening land: the viewer's question, the refusal to answer it generally, the promise of three questions, and then the maternity-return proof at about 0:24.</a:t>
+            </a:r>
+          </a:p>
+          <a:p>
+            <a:r>
+              <a:t>FACTUAL BOUNDARY, exact: about six months after Temidayo came back from maternity leave, in one chapter of her career, her scope expanded beyond the original box of the role. The meaningful part was being trusted with DIFFERENT work, not more of the same. No employer, assignment, result, promotion, metric or conversation.</a:t>
+            </a:r>
+          </a:p>
+          <a:p>
+            <a:r>
+              <a:t>NO MATERNITY OR BABY IMAGERY of any kind. The proof is her saying what happened.</a:t>
+            </a:r>
+          </a:p>
+          <a:p>
+            <a:r>
+              <a:t>“I did not see that clearly at the time. I noticed the load first, the way most of us do.” That is the relearning beat, and it is what keeps the story from sounding like hindsight wisdom. Keep it.</a:t>
             </a:r>
           </a:p>
           <a:p>
             <a:r>
               <a:t>State one holds the main statement; reveal INTERNAL MOVE ≠ AUTOMATIC GROWTH after it. The not-equal sign is drawn, not typeset — no brand font has the glyph.</a:t>
+            </a:r>
+          </a:p>
+          <a:p>
+            <a:r>
+              <a:t>Reveal states: 2. Reveal frame 1–2 in the build deck.</a:t>
             </a:r>
           </a:p>
         </p:txBody>
@@ -608,37 +623,37 @@
           <a:lstStyle/>
           <a:p>
             <a:r>
-              <a:t>Timing: approximately 9:08.</a:t>
-            </a:r>
-          </a:p>
-          <a:p>
-            <a:r>
-              <a:t>Progressive reveal, one prompt at a time. Then Temidayo carries a long stretch on camera — no new slide for any of it.</a:t>
-            </a:r>
-          </a:p>
-          <a:p>
-            <a:r>
-              <a:t>What the answers say about the organisation. Being capable and still landing in a badly designed role. The same three questions applied to an external offer. When an internal move will not fix the problem.</a:t>
-            </a:r>
-          </a:p>
-          <a:p>
-            <a:r>
-              <a:t>THE SAFETY BOUNDARY sits here and is not optional: if health or safety is at risk, or the viewer is dealing with harassment or discrimination, they do not need a mobility strategy — they need to protect themselves and get proper support. Deliver it plainly, on camera, with captions. Not fine print.</a:t>
-            </a:r>
-          </a:p>
-          <a:p>
-            <a:r>
-              <a:t>Then the life factors: pay, caregiving, location, immigration status, energy, timing.</a:t>
-            </a:r>
-          </a:p>
-          <a:p>
-            <a:r>
-              <a:t>IDENTITY EXIT, at about 11:06: "I want you to be able to read any opportunity — inside or outside — for what it will actually build in you… Once you can do that, you stop needing anyone to tell you whether an opportunity is good. You can see it yourself."</a:t>
-            </a:r>
-          </a:p>
-          <a:p>
-            <a:r>
-              <a:t>That last sentence is the point of the video. If the edit runs long, cut something else.</a:t>
+              <a:t>Timing: approximately 7:41.</a:t>
+            </a:r>
+          </a:p>
+          <a:p>
+            <a:r>
+              <a:t>Slide 10 — Conversation Prompts.</a:t>
+            </a:r>
+          </a:p>
+          <a:p>
+            <a:r>
+              <a:t>Cue — the line that lands on this slide: “If you want to take this into a conversation, here is how I would ask.”</a:t>
+            </a:r>
+          </a:p>
+          <a:p>
+            <a:r>
+              <a:t>The three conversation prompts reveal one at a time.</a:t>
+            </a:r>
+          </a:p>
+          <a:p>
+            <a:r>
+              <a:t>“Those are not demanding questions.” The reassurance is doing real work for a viewer who is nervous about asking. Keep it.</a:t>
+            </a:r>
+          </a:p>
+          <a:p>
+            <a:r>
+              <a:t>THE IDENTITY EXIT sits at the end of this slide: reading every opportunity for what it will actually build in you, and not needing a title to tell you whether a year was worth it. It is the point of the video. If the edit runs long, cut something else.</a:t>
+            </a:r>
+          </a:p>
+          <a:p>
+            <a:r>
+              <a:t>Reveal states: 3. Reveal frame 21–23 in the build deck.</a:t>
             </a:r>
           </a:p>
         </p:txBody>
@@ -708,27 +723,32 @@
           <a:lstStyle/>
           <a:p>
             <a:r>
-              <a:t>Timing: approximately 11:33.</a:t>
-            </a:r>
-          </a:p>
-          <a:p>
-            <a:r>
-              <a:t>Calm and brief. The only invitation in the video, and it is the Career Decision Evidence Check — not the Field Kit, not Keep the Proof, not the Starter.</a:t>
-            </a:r>
-          </a:p>
-          <a:p>
-            <a:r>
-              <a:t>It lands AFTER the identity bridge. Keep that order.</a:t>
-            </a:r>
-          </a:p>
-          <a:p>
-            <a:r>
-              <a:t>The one-sentence exercise comes first, then the offer: "I made the Career Decision Evidence Check to help you organise the evidence behind that choice." Offered, not announced.</a:t>
-            </a:r>
-          </a:p>
-          <a:p>
-            <a:r>
-              <a:t>CTA PRODUCTION GATE: SATISFIED. Retain one signed-out link check in the final upload SOP.</a:t>
+              <a:t>Timing: approximately 8:42.</a:t>
+            </a:r>
+          </a:p>
+          <a:p>
+            <a:r>
+              <a:t>Slide 11 — Career Decision Evidence Check.</a:t>
+            </a:r>
+          </a:p>
+          <a:p>
+            <a:r>
+              <a:t>Cue — the line that lands on this slide: “If you want a structured way to do this, I made the Career Decision Evidence Check.”</a:t>
+            </a:r>
+          </a:p>
+          <a:p>
+            <a:r>
+              <a:t>One CTA in this video. Do not add CAR, the Career Evidence 3 Cs, the Field Kit, Keep the Proof or the Career Evidence Starter.</a:t>
+            </a:r>
+          </a:p>
+          <a:p>
+            <a:r>
+              <a:t>Offered, not announced. CTA production gate: SATISFIED — retain one signed-out link check in the upload SOP.</a:t>
+            </a:r>
+          </a:p>
+          <a:p>
+            <a:r>
+              <a:t>Single state. Reveal frame 24 in the build deck.</a:t>
             </a:r>
           </a:p>
         </p:txBody>
@@ -798,27 +818,32 @@
           <a:lstStyle/>
           <a:p>
             <a:r>
-              <a:t>Timing: approximately 12:01 to the end, about 12:26.</a:t>
-            </a:r>
-          </a:p>
-          <a:p>
-            <a:r>
-              <a:t>All content is held left of x=1130 so the right side stays clear for the YouTube end-screen element.</a:t>
-            </a:r>
-          </a:p>
-          <a:p>
-            <a:r>
-              <a:t>Watch next is Video 6, Are You Growing—or Just Being Given More Work? Use direct end-screen routing once Video 6 is public; before that, the Career Portability playlist. Do not leave Subscribe as the only end-screen element.</a:t>
-            </a:r>
-          </a:p>
-          <a:p>
-            <a:r>
-              <a:t>Closing lines: "You may not need to leave. But the next move should increase what you can carry." Stay on her for both.</a:t>
-            </a:r>
-          </a:p>
-          <a:p>
-            <a:r>
-              <a:t>Hold the final frame for at least 12 seconds.</a:t>
+              <a:t>Timing: approximately 9:03.</a:t>
+            </a:r>
+          </a:p>
+          <a:p>
+            <a:r>
+              <a:t>Slide 12 — Watch Next.</a:t>
+            </a:r>
+          </a:p>
+          <a:p>
+            <a:r>
+              <a:t>Cue — the line that lands on this slide: “And there is a version of this question that turns up without any move at all.”</a:t>
+            </a:r>
+          </a:p>
+          <a:p>
+            <a:r>
+              <a:t>The Video 6 route. Card reads “Are You Growing—or Just Being Given More Work?”.</a:t>
+            </a:r>
+          </a:p>
+          <a:p>
+            <a:r>
+              <a:t>Sign off clean on the last two lines. No music sting.</a:t>
+            </a:r>
+          </a:p>
+          <a:p>
+            <a:r>
+              <a:t>Single state. Reveal frame 25 in the build deck.</a:t>
             </a:r>
           </a:p>
         </p:txBody>
@@ -888,22 +913,27 @@
           <a:lstStyle/>
           <a:p>
             <a:r>
-              <a:t>Timing: approximately 1:18.</a:t>
-            </a:r>
-          </a:p>
-          <a:p>
-            <a:r>
-              <a:t>The channel line and the three questions.</a:t>
-            </a:r>
-          </a:p>
-          <a:p>
-            <a:r>
-              <a:t>Reveal one question at a time. These are the only memory device in the video — no acronym, no second framework, and CAR belongs to Video 6.</a:t>
-            </a:r>
-          </a:p>
-          <a:p>
-            <a:r>
-              <a:t>Close on the reframe: the point is not whether you moved, it is whether the move increased what you can carry afterwards.</a:t>
+              <a:t>Timing: approximately 2:23.</a:t>
+            </a:r>
+          </a:p>
+          <a:p>
+            <a:r>
+              <a:t>Slide 2 — The Three Questions.</a:t>
+            </a:r>
+          </a:p>
+          <a:p>
+            <a:r>
+              <a:t>Cue — the line that lands on this slide: “Will the work change? Will your judgment expand? And will the evidence travel?.”</a:t>
+            </a:r>
+          </a:p>
+          <a:p>
+            <a:r>
+              <a:t>The three questions reveal one at a time. These are the only memory device in the video — no acronym, no second framework, and CAR belongs to Video 6.</a:t>
+            </a:r>
+          </a:p>
+          <a:p>
+            <a:r>
+              <a:t>Reveal states: 3. Reveal frame 3–5 in the build deck.</a:t>
             </a:r>
           </a:p>
         </p:txBody>
@@ -973,17 +1003,27 @@
           <a:lstStyle/>
           <a:p>
             <a:r>
-              <a:t>Timing: approximately 1:49, holding to about 2:24.</a:t>
-            </a:r>
-          </a:p>
-          <a:p>
-            <a:r>
-              <a:t>Section break, then straight into the first question.</a:t>
-            </a:r>
-          </a:p>
-          <a:p>
-            <a:r>
-              <a:t>The instruction is vivid and specific: picture an ordinary Monday four months in, not the announcement and not the first week. Keep that framing — it is what stops the viewer answering about the title.</a:t>
+              <a:t>Timing: approximately 2:32.</a:t>
+            </a:r>
+          </a:p>
+          <a:p>
+            <a:r>
+              <a:t>Slide 3 — 1 — Will the Work Change?.</a:t>
+            </a:r>
+          </a:p>
+          <a:p>
+            <a:r>
+              <a:t>Cue — the line that lands on this slide: “The first question is whether the work itself will actually change.”</a:t>
+            </a:r>
+          </a:p>
+          <a:p>
+            <a:r>
+              <a:t>Section break only.</a:t>
+            </a:r>
+          </a:p>
+          <a:p>
+            <a:r>
+              <a:t>Single state. Reveal frame 6 in the build deck.</a:t>
             </a:r>
           </a:p>
         </p:txBody>
@@ -1053,27 +1093,42 @@
           <a:lstStyle/>
           <a:p>
             <a:r>
-              <a:t>Timing: approximately 2:24.</a:t>
-            </a:r>
-          </a:p>
-          <a:p>
-            <a:r>
-              <a:t>Reveal the four access variables one at a time.</a:t>
-            </a:r>
-          </a:p>
-          <a:p>
-            <a:r>
-              <a:t>Not all four are required. Familiarity is named as an advantage before it is named as a risk — keep that order, it is what makes the section fair.</a:t>
-            </a:r>
-          </a:p>
-          <a:p>
-            <a:r>
-              <a:t>At about 3:20 comes the organisational beat, and it is the most delicate thing in the video: the people who value you most may be the ones least able to imagine you doing something else, because every time you were excellent in one shape you made that shape more convincing. "That is not them being unfair." Do not let an edit turn this into a grievance.</a:t>
-            </a:r>
-          </a:p>
-          <a:p>
-            <a:r>
-              <a:t>Then the questions to ask, then the limit: a move that does not change the work can still be right. "I just do not want you calling it development when it is relief. Both are allowed." Do not cut that.</a:t>
+              <a:t>Timing: approximately 2:36.</a:t>
+            </a:r>
+          </a:p>
+          <a:p>
+            <a:r>
+              <a:t>Slide 4 — Access Test.</a:t>
+            </a:r>
+          </a:p>
+          <a:p>
+            <a:r>
+              <a:t>Cue — the line that lands on this slide: “And I do not mean the job description.”</a:t>
+            </a:r>
+          </a:p>
+          <a:p>
+            <a:r>
+              <a:t>The four access variables reveal one at a time, in the order spoken.</a:t>
+            </a:r>
+          </a:p>
+          <a:p>
+            <a:r>
+              <a:t>“Job descriptions are written to be approved, not to be accurate.” Keep it.</a:t>
+            </a:r>
+          </a:p>
+          <a:p>
+            <a:r>
+              <a:t>The permission beat matters: taking more of the same work can still be the right call this year, as long as the viewer takes it knowing what it is. Do not edit this into a warning.</a:t>
+            </a:r>
+          </a:p>
+          <a:p>
+            <a:r>
+              <a:t>Her own line closes the slide — what changed was the kind of problem reaching her, not the volume. Bounded exactly as above.</a:t>
+            </a:r>
+          </a:p>
+          <a:p>
+            <a:r>
+              <a:t>Reveal states: 4. Reveal frame 7–10 in the build deck.</a:t>
             </a:r>
           </a:p>
         </p:txBody>
@@ -1143,12 +1198,27 @@
           <a:lstStyle/>
           <a:p>
             <a:r>
-              <a:t>Timing: approximately 4:33, holding to about 4:41.</a:t>
-            </a:r>
-          </a:p>
-          <a:p>
-            <a:r>
-              <a:t>Section break. Hold briefly, then back to presenter.</a:t>
+              <a:t>Timing: approximately 3:46.</a:t>
+            </a:r>
+          </a:p>
+          <a:p>
+            <a:r>
+              <a:t>Slide 5 — 2 — Will Your Judgment Expand?.</a:t>
+            </a:r>
+          </a:p>
+          <a:p>
+            <a:r>
+              <a:t>Cue — the line that lands on this slide: “The second question is whether your judgment will expand.”</a:t>
+            </a:r>
+          </a:p>
+          <a:p>
+            <a:r>
+              <a:t>Section break only.</a:t>
+            </a:r>
+          </a:p>
+          <a:p>
+            <a:r>
+              <a:t>Single state. Reveal frame 11 in the build deck.</a:t>
             </a:r>
           </a:p>
         </p:txBody>
@@ -1218,22 +1288,42 @@
           <a:lstStyle/>
           <a:p>
             <a:r>
-              <a:t>Timing: approximately 4:41.</a:t>
-            </a:r>
-          </a:p>
-          <a:p>
-            <a:r>
-              <a:t>Show MORE TASKS alone first, then bring up MORE JUDGMENT.</a:t>
-            </a:r>
-          </a:p>
-          <a:p>
-            <a:r>
-              <a:t>The authority point matters as much as the contrast: accountability without influence is "exposure without ownership, and a well-known way for capable people to end up looking worse than they are."</a:t>
-            </a:r>
-          </a:p>
-          <a:p>
-            <a:r>
-              <a:t>Then the three questions to ask the hiring manager, and the closing test — if the clearest answer is "you will have more to manage", keep asking.</a:t>
+              <a:t>Timing: approximately 3:50.</a:t>
+            </a:r>
+          </a:p>
+          <a:p>
+            <a:r>
+              <a:t>Slide 6 — More Tasks / More Judgment.</a:t>
+            </a:r>
+          </a:p>
+          <a:p>
+            <a:r>
+              <a:t>Cue — the line that lands on this slide: “This is the one most of us never ask, because it is hard to see from outside a role.”</a:t>
+            </a:r>
+          </a:p>
+          <a:p>
+            <a:r>
+              <a:t>MORE TASKS beside MORE JUDGMENT. Reveal both, then hold.</a:t>
+            </a:r>
+          </a:p>
+          <a:p>
+            <a:r>
+              <a:t>“Not what you will do. What you will decide.” This is the test. Give it room.</a:t>
+            </a:r>
+          </a:p>
+          <a:p>
+            <a:r>
+              <a:t>THE ORGANISATIONAL LAYER is on this slide: the people who value you most may still see you through the role they already know you for. Deliver it as description, not grievance — “That is not disloyalty. It is how organisations remember people.”</a:t>
+            </a:r>
+          </a:p>
+          <a:p>
+            <a:r>
+              <a:t>Then it is translated straight back to the viewer: the story your organisation tells about you is a year or two behind what you can do, and closing that gap is maintenance, not self-promotion. Do not cut the translation — without it the section becomes an HR observation.</a:t>
+            </a:r>
+          </a:p>
+          <a:p>
+            <a:r>
+              <a:t>Reveal states: 2. Reveal frame 12–13 in the build deck.</a:t>
             </a:r>
           </a:p>
         </p:txBody>
@@ -1303,17 +1393,27 @@
           <a:lstStyle/>
           <a:p>
             <a:r>
-              <a:t>Timing: approximately 6:45, holding to about 7:09.</a:t>
-            </a:r>
-          </a:p>
-          <a:p>
-            <a:r>
-              <a:t>Section break.</a:t>
-            </a:r>
-          </a:p>
-          <a:p>
-            <a:r>
-              <a:t>Credibility inside a company does not automatically make sense outside it. The people around the viewer watched it happen; someone else did not.</a:t>
+              <a:t>Timing: approximately 5:28.</a:t>
+            </a:r>
+          </a:p>
+          <a:p>
+            <a:r>
+              <a:t>Slide 7 — 3 — Will the Evidence Travel?.</a:t>
+            </a:r>
+          </a:p>
+          <a:p>
+            <a:r>
+              <a:t>Cue — the line that lands on this slide: “The third question is whether the evidence will travel.”</a:t>
+            </a:r>
+          </a:p>
+          <a:p>
+            <a:r>
+              <a:t>Section break only.</a:t>
+            </a:r>
+          </a:p>
+          <a:p>
+            <a:r>
+              <a:t>Single state. Reveal frame 14 in the build deck.</a:t>
             </a:r>
           </a:p>
         </p:txBody>
@@ -1383,22 +1483,32 @@
           <a:lstStyle/>
           <a:p>
             <a:r>
-              <a:t>Timing: approximately 7:09.</a:t>
-            </a:r>
-          </a:p>
-          <a:p>
-            <a:r>
-              <a:t>Reveal Result, Judgment and Range in order.</a:t>
-            </a:r>
-          </a:p>
-          <a:p>
-            <a:r>
-              <a:t>The target sentence is the one to protect: "I moved into a new context, I was trusted to make this kind of call, and here is what was different because of it." That is what a portable answer sounds like.</a:t>
-            </a:r>
-          </a:p>
-          <a:p>
-            <a:r>
-              <a:t>Close on the translation test — if you cannot say what the role could prove, you do not yet know what it will build.</a:t>
+              <a:t>Timing: approximately 5:32.</a:t>
+            </a:r>
+          </a:p>
+          <a:p>
+            <a:r>
+              <a:t>Slide 8 — Result / Judgment / Range.</a:t>
+            </a:r>
+          </a:p>
+          <a:p>
+            <a:r>
+              <a:t>Cue — the line that lands on this slide: “In eighteen months, when this move is finished, what will you be able to show for it?.”</a:t>
+            </a:r>
+          </a:p>
+          <a:p>
+            <a:r>
+              <a:t>RESULT / JUDGMENT / RANGE. Reveal one at a time.</a:t>
+            </a:r>
+          </a:p>
+          <a:p>
+            <a:r>
+              <a:t>The internal-move weakness is the honest limit in this section: a lot of internal work is legible only inside the building. Keep it — it is the one place the video argues against its own thumbnail, which is what makes it trustworthy.</a:t>
+            </a:r>
+          </a:p>
+          <a:p>
+            <a:r>
+              <a:t>Reveal states: 3. Reveal frame 15–17 in the build deck.</a:t>
             </a:r>
           </a:p>
         </p:txBody>
@@ -1468,22 +1578,42 @@
           <a:lstStyle/>
           <a:p>
             <a:r>
-              <a:t>Timing: approximately 8:08.</a:t>
-            </a:r>
-          </a:p>
-          <a:p>
-            <a:r>
-              <a:t>Reveal the rows one at a time. Do NOT gamify this — no scorecard treatment, no tally graphics.</a:t>
-            </a:r>
-          </a:p>
-          <a:p>
-            <a:r>
-              <a:t>Two yeses is not a rejection; it is something specific to negotiate before accepting.</a:t>
-            </a:r>
-          </a:p>
-          <a:p>
-            <a:r>
-              <a:t>Zero or one is not a verdict either. Better pay, better hours, a better manager, stability while life is complicated — all real reasons. "Just name the trade honestly. You do not have to call every useful move growth." </a:t>
+              <a:t>Timing: approximately 6:27.</a:t>
+            </a:r>
+          </a:p>
+          <a:p>
+            <a:r>
+              <a:t>Slide 9 — Decision Read.</a:t>
+            </a:r>
+          </a:p>
+          <a:p>
+            <a:r>
+              <a:t>Cue — the line that lands on this slide: “So read the three together.”</a:t>
+            </a:r>
+          </a:p>
+          <a:p>
+            <a:r>
+              <a:t>The 3 / 2 / 0–1 read. Never gamified, never scored, no progress bar.</a:t>
+            </a:r>
+          </a:p>
+          <a:p>
+            <a:r>
+              <a:t>“One or none is not automatically a no.” Keep that sentence — without it the read becomes a verdict.</a:t>
+            </a:r>
+          </a:p>
+          <a:p>
+            <a:r>
+              <a:t>The limits paragraph follows: pay, manager, commute, family, tiredness. Any one of them can outweigh all three questions. Do not cut it.</a:t>
+            </a:r>
+          </a:p>
+          <a:p>
+            <a:r>
+              <a:t>The closing instruction is easy to lose in an edit: run these three on the role you are in right now, not only when somebody offers you something.</a:t>
+            </a:r>
+          </a:p>
+          <a:p>
+            <a:r>
+              <a:t>Reveal states: 3. Reveal frame 18–20 in the build deck.</a:t>
             </a:r>
           </a:p>
         </p:txBody>

--- a/deliverables/video-5-slides/out/Video_5_Main_Slides.pptx
+++ b/deliverables/video-5-slides/out/Video_5_Main_Slides.pptx
@@ -623,7 +623,7 @@
           <a:lstStyle/>
           <a:p>
             <a:r>
-              <a:t>Timing: approximately 7:41.</a:t>
+              <a:t>Timing: approximately 7:44.</a:t>
             </a:r>
           </a:p>
           <a:p>
@@ -723,7 +723,7 @@
           <a:lstStyle/>
           <a:p>
             <a:r>
-              <a:t>Timing: approximately 8:42.</a:t>
+              <a:t>Timing: approximately 8:43.</a:t>
             </a:r>
           </a:p>
           <a:p>
@@ -818,7 +818,7 @@
           <a:lstStyle/>
           <a:p>
             <a:r>
-              <a:t>Timing: approximately 9:03.</a:t>
+              <a:t>Timing: approximately 9:04.</a:t>
             </a:r>
           </a:p>
           <a:p>
@@ -1113,7 +1113,7 @@
           </a:p>
           <a:p>
             <a:r>
-              <a:t>“Job descriptions are written to be approved, not to be accurate.” Keep it.</a:t>
+              <a:t>“A job description can tell you the broad role. It may not tell you what an ordinary Monday will actually ask of you.” Keep the bounded form — the script does not claim job descriptions are written to be inaccurate.</a:t>
             </a:r>
           </a:p>
           <a:p>
@@ -1198,7 +1198,7 @@
           <a:lstStyle/>
           <a:p>
             <a:r>
-              <a:t>Timing: approximately 3:46.</a:t>
+              <a:t>Timing: approximately 3:51.</a:t>
             </a:r>
           </a:p>
           <a:p>
@@ -1288,7 +1288,7 @@
           <a:lstStyle/>
           <a:p>
             <a:r>
-              <a:t>Timing: approximately 3:50.</a:t>
+              <a:t>Timing: approximately 3:55.</a:t>
             </a:r>
           </a:p>
           <a:p>
@@ -1313,12 +1313,12 @@
           </a:p>
           <a:p>
             <a:r>
-              <a:t>THE ORGANISATIONAL LAYER is on this slide: the people who value you most may still see you through the role they already know you for. Deliver it as description, not grievance — “That is not disloyalty. It is how organisations remember people.”</a:t>
-            </a:r>
-          </a:p>
-          <a:p>
-            <a:r>
-              <a:t>Then it is translated straight back to the viewer: the story your organisation tells about you is a year or two behind what you can do, and closing that gap is maintenance, not self-promotion. Do not cut the translation — without it the section becomes an HR observation.</a:t>
+              <a:t>THE ORGANISATIONAL LAYER is on this slide: the people who value you most may still see you through the role they already know you for. Deliver it as description, not grievance — “That is not disloyalty. It is how organizations remember people.”</a:t>
+            </a:r>
+          </a:p>
+          <a:p>
+            <a:r>
+              <a:t>Then it is translated straight back to the viewer: the story people inside an organization tell about you can lag behind what you are actually ready to do now, and closing that gap is maintenance, not self-promotion. Do not cut the translation — without it the section becomes an HR observation. Note the bounded form: “can lag”, with no timescale attached.</a:t>
             </a:r>
           </a:p>
           <a:p>
@@ -1393,7 +1393,7 @@
           <a:lstStyle/>
           <a:p>
             <a:r>
-              <a:t>Timing: approximately 5:28.</a:t>
+              <a:t>Timing: approximately 5:36.</a:t>
             </a:r>
           </a:p>
           <a:p>
@@ -1483,7 +1483,7 @@
           <a:lstStyle/>
           <a:p>
             <a:r>
-              <a:t>Timing: approximately 5:32.</a:t>
+              <a:t>Timing: approximately 5:39.</a:t>
             </a:r>
           </a:p>
           <a:p>
@@ -1503,7 +1503,7 @@
           </a:p>
           <a:p>
             <a:r>
-              <a:t>The internal-move weakness is the honest limit in this section: a lot of internal work is legible only inside the building. Keep it — it is the one place the video argues against its own thumbnail, which is what makes it trustworthy.</a:t>
+              <a:t>The honest limit in this section is narrow and must stay narrow: internal moves can be especially easy to describe only in internal language, so if the outcome only makes sense to people inside the company it has to be translated before the viewer assumes the evidence will travel. It is NOT a claim that internal work is generally illegible. Keep it — it is the one place the video argues against its own thumbnail, which is what makes it trustworthy.</a:t>
             </a:r>
           </a:p>
           <a:p>
@@ -1578,7 +1578,7 @@
           <a:lstStyle/>
           <a:p>
             <a:r>
-              <a:t>Timing: approximately 6:27.</a:t>
+              <a:t>Timing: approximately 6:30.</a:t>
             </a:r>
           </a:p>
           <a:p>

--- a/deliverables/video-5-slides/out/Video_5_Main_Slides.pptx
+++ b/deliverables/video-5-slides/out/Video_5_Main_Slides.pptx
@@ -1313,7 +1313,7 @@
           </a:p>
           <a:p>
             <a:r>
-              <a:t>THE ORGANISATIONAL LAYER is on this slide: the people who value you most may still see you through the role they already know you for. Deliver it as description, not grievance — “That is not disloyalty. It is how organizations remember people.”</a:t>
+              <a:t>THE ORGANIZATIONAL LAYER is on this slide: the people who value you most may still see you through the role they already know you for. Deliver it as description, not grievance — “That is not disloyalty. It is how organizations remember people.”</a:t>
             </a:r>
           </a:p>
           <a:p>
